--- a/Report QA - team walkthrough.pptx
+++ b/Report QA - team walkthrough.pptx
@@ -3023,12 +3023,63 @@
         </p:nvSpPr>
         <p:spPr>
           <a:xfrm>
-            <a:off x="566928" y="4617720"/>
-            <a:ext cx="11057839" cy="1234440"/>
+            <a:off x="1188720" y="4425696"/>
+            <a:ext cx="9802368" cy="1167107"/>
           </a:xfrm>
           <a:prstGeom prst="roundRect">
             <a:avLst>
-              <a:gd name="adj" fmla="val 5185"/>
+              <a:gd name="adj" fmla="val 4701"/>
+            </a:avLst>
+          </a:prstGeom>
+          <a:solidFill>
+            <a:srgbClr val="FFFFFF"/>
+          </a:solidFill>
+          <a:ln w="12700">
+            <a:solidFill>
+              <a:srgbClr val="DCE4EF"/>
+            </a:solidFill>
+            <a:prstDash val="solid"/>
+          </a:ln>
+        </p:spPr>
+      </p:sp>
+      <p:pic>
+        <p:nvPicPr>
+          <p:cNvPr id="17" name="Image 0" descr="preencoded.png">    </p:cNvPr>
+          <p:cNvPicPr>
+            <a:picLocks noChangeAspect="1"/>
+          </p:cNvPicPr>
+          <p:nvPr/>
+        </p:nvPicPr>
+        <p:blipFill>
+          <a:blip r:embed="rId1"/>
+          <a:stretch>
+            <a:fillRect/>
+          </a:stretch>
+        </p:blipFill>
+        <p:spPr>
+          <a:xfrm>
+            <a:off x="1243584" y="4480560"/>
+            <a:ext cx="9692640" cy="1057379"/>
+          </a:xfrm>
+          <a:prstGeom prst="rect">
+            <a:avLst/>
+          </a:prstGeom>
+        </p:spPr>
+      </p:pic>
+      <p:sp>
+        <p:nvSpPr>
+          <p:cNvPr id="18" name="Shape 15"/>
+          <p:cNvSpPr/>
+          <p:nvPr/>
+        </p:nvSpPr>
+        <p:spPr>
+          <a:xfrm>
+            <a:off x="566928" y="5720819"/>
+            <a:ext cx="11057839" cy="640080"/>
+          </a:xfrm>
+          <a:prstGeom prst="roundRect">
+            <a:avLst>
+              <a:gd name="adj" fmla="val 10000"/>
             </a:avLst>
           </a:prstGeom>
           <a:solidFill>
@@ -3044,33 +3095,30 @@
       </p:sp>
       <p:sp>
         <p:nvSpPr>
-          <p:cNvPr id="17" name="Text 15"/>
-          <p:cNvSpPr txBox="1"/>
-          <p:nvPr/>
-        </p:nvSpPr>
-        <p:spPr>
-          <a:xfrm>
-            <a:off x="896112" y="4617720"/>
-            <a:ext cx="10399471" cy="1234440"/>
-          </a:xfrm>
-          <a:prstGeom prst="rect">
-            <a:avLst/>
-          </a:prstGeom>
-          <a:noFill/>
-          <a:ln/>
-        </p:spPr>
-        <p:txBody>
-          <a:bodyPr wrap="square" lIns="0" tIns="0" rIns="0" bIns="0" rtlCol="0" anchor="ctr"/>
-          <a:lstStyle/>
-          <a:p>
-            <a:pPr indent="0" marL="0">
-              <a:lnSpc>
-                <a:spcPct val="120000"/>
-              </a:lnSpc>
-              <a:buNone/>
-            </a:pPr>
-            <a:r>
-              <a:rPr lang="en-US" sz="1450" b="1" dirty="0">
+          <p:cNvPr id="19" name="Text 16"/>
+          <p:cNvSpPr txBox="1"/>
+          <p:nvPr/>
+        </p:nvSpPr>
+        <p:spPr>
+          <a:xfrm>
+            <a:off x="896112" y="5720819"/>
+            <a:ext cx="10399471" cy="640080"/>
+          </a:xfrm>
+          <a:prstGeom prst="rect">
+            <a:avLst/>
+          </a:prstGeom>
+          <a:noFill/>
+          <a:ln/>
+        </p:spPr>
+        <p:txBody>
+          <a:bodyPr wrap="square" lIns="0" tIns="0" rIns="0" bIns="0" rtlCol="0" anchor="ctr"/>
+          <a:lstStyle/>
+          <a:p>
+            <a:pPr indent="0" marL="0">
+              <a:buNone/>
+            </a:pPr>
+            <a:r>
+              <a:rPr lang="en-US" sz="1350" b="1" dirty="0">
                 <a:solidFill>
                   <a:srgbClr val="0B1622"/>
                 </a:solidFill>
@@ -3081,13 +3129,10 @@
               <a:t>All four quote the flagged text. </a:t>
             </a:r>
             <a:pPr indent="0" marL="0">
-              <a:lnSpc>
-                <a:spcPct val="120000"/>
-              </a:lnSpc>
-              <a:buNone/>
-            </a:pPr>
-            <a:r>
-              <a:rPr lang="en-US" sz="1450" dirty="0">
+              <a:buNone/>
+            </a:pPr>
+            <a:r>
+              <a:rPr lang="en-US" sz="1350" dirty="0">
                 <a:solidFill>
                   <a:srgbClr val="5C6B7F"/>
                 </a:solidFill>
@@ -3098,13 +3143,10 @@
               <a:t>"Line 42 has an American spelling" sends the author hunting. </a:t>
             </a:r>
             <a:pPr indent="0" marL="0">
-              <a:lnSpc>
-                <a:spcPct val="120000"/>
-              </a:lnSpc>
-              <a:buNone/>
-            </a:pPr>
-            <a:r>
-              <a:rPr lang="en-US" sz="1450" dirty="0">
+              <a:buNone/>
+            </a:pPr>
+            <a:r>
+              <a:rPr lang="en-US" sz="1350" dirty="0">
                 <a:solidFill>
                   <a:srgbClr val="4A3300"/>
                 </a:solidFill>
@@ -3118,13 +3160,10 @@
               <a:t>Found: "color"</a:t>
             </a:r>
             <a:pPr indent="0" marL="0">
-              <a:lnSpc>
-                <a:spcPct val="120000"/>
-              </a:lnSpc>
-              <a:buNone/>
-            </a:pPr>
-            <a:r>
-              <a:rPr lang="en-US" sz="1450" dirty="0">
+              <a:buNone/>
+            </a:pPr>
+            <a:r>
+              <a:rPr lang="en-US" sz="1350" dirty="0">
                 <a:solidFill>
                   <a:srgbClr val="5C6B7F"/>
                 </a:solidFill>
@@ -3134,7 +3173,7 @@
               </a:rPr>
               <a:t> does not.</a:t>
             </a:r>
-            <a:endParaRPr lang="en-US" sz="1450" dirty="0"/>
+            <a:endParaRPr lang="en-US" sz="1350" dirty="0"/>
           </a:p>
         </p:txBody>
       </p:sp>
@@ -8487,7 +8526,7 @@
         <p:spPr>
           <a:xfrm>
             <a:off x="566928" y="2267712"/>
-            <a:ext cx="2331720" cy="914400"/>
+            <a:ext cx="2331720" cy="676656"/>
           </a:xfrm>
           <a:prstGeom prst="rect">
             <a:avLst/>
@@ -8529,7 +8568,7 @@
         <p:spPr>
           <a:xfrm>
             <a:off x="3172968" y="2267712"/>
-            <a:ext cx="3931920" cy="914400"/>
+            <a:ext cx="3931920" cy="676656"/>
           </a:xfrm>
           <a:prstGeom prst="rect">
             <a:avLst/>
@@ -8571,7 +8610,7 @@
         <p:spPr>
           <a:xfrm>
             <a:off x="7379208" y="2267712"/>
-            <a:ext cx="3971239" cy="914400"/>
+            <a:ext cx="3971239" cy="676656"/>
           </a:xfrm>
           <a:prstGeom prst="rect">
             <a:avLst/>
@@ -8612,8 +8651,8 @@
         </p:nvSpPr>
         <p:spPr>
           <a:xfrm>
-            <a:off x="566928" y="3291840"/>
-            <a:ext cx="2331720" cy="914400"/>
+            <a:off x="566928" y="2999232"/>
+            <a:ext cx="2331720" cy="676656"/>
           </a:xfrm>
           <a:prstGeom prst="rect">
             <a:avLst/>
@@ -8654,8 +8693,8 @@
         </p:nvSpPr>
         <p:spPr>
           <a:xfrm>
-            <a:off x="3172968" y="3291840"/>
-            <a:ext cx="3931920" cy="914400"/>
+            <a:off x="3172968" y="2999232"/>
+            <a:ext cx="3931920" cy="676656"/>
           </a:xfrm>
           <a:prstGeom prst="rect">
             <a:avLst/>
@@ -8696,8 +8735,8 @@
         </p:nvSpPr>
         <p:spPr>
           <a:xfrm>
-            <a:off x="7379208" y="3291840"/>
-            <a:ext cx="3971239" cy="914400"/>
+            <a:off x="7379208" y="2999232"/>
+            <a:ext cx="3971239" cy="676656"/>
           </a:xfrm>
           <a:prstGeom prst="rect">
             <a:avLst/>
@@ -8738,8 +8777,8 @@
         </p:nvSpPr>
         <p:spPr>
           <a:xfrm>
-            <a:off x="566928" y="4315968"/>
-            <a:ext cx="2331720" cy="914400"/>
+            <a:off x="566928" y="3730752"/>
+            <a:ext cx="2331720" cy="676656"/>
           </a:xfrm>
           <a:prstGeom prst="rect">
             <a:avLst/>
@@ -8780,8 +8819,8 @@
         </p:nvSpPr>
         <p:spPr>
           <a:xfrm>
-            <a:off x="3172968" y="4315968"/>
-            <a:ext cx="3931920" cy="914400"/>
+            <a:off x="3172968" y="3730752"/>
+            <a:ext cx="3931920" cy="676656"/>
           </a:xfrm>
           <a:prstGeom prst="rect">
             <a:avLst/>
@@ -8822,8 +8861,8 @@
         </p:nvSpPr>
         <p:spPr>
           <a:xfrm>
-            <a:off x="7379208" y="4315968"/>
-            <a:ext cx="3971239" cy="914400"/>
+            <a:off x="7379208" y="3730752"/>
+            <a:ext cx="3971239" cy="676656"/>
           </a:xfrm>
           <a:prstGeom prst="rect">
             <a:avLst/>
@@ -8864,8 +8903,8 @@
         </p:nvSpPr>
         <p:spPr>
           <a:xfrm>
-            <a:off x="566928" y="5340096"/>
-            <a:ext cx="2331720" cy="914400"/>
+            <a:off x="566928" y="4462272"/>
+            <a:ext cx="2331720" cy="676656"/>
           </a:xfrm>
           <a:prstGeom prst="rect">
             <a:avLst/>
@@ -8906,8 +8945,8 @@
         </p:nvSpPr>
         <p:spPr>
           <a:xfrm>
-            <a:off x="3172968" y="5340096"/>
-            <a:ext cx="3931920" cy="914400"/>
+            <a:off x="3172968" y="4462272"/>
+            <a:ext cx="3931920" cy="676656"/>
           </a:xfrm>
           <a:prstGeom prst="rect">
             <a:avLst/>
@@ -8948,8 +8987,8 @@
         </p:nvSpPr>
         <p:spPr>
           <a:xfrm>
-            <a:off x="7379208" y="5340096"/>
-            <a:ext cx="3971239" cy="914400"/>
+            <a:off x="7379208" y="4462272"/>
+            <a:ext cx="3971239" cy="676656"/>
           </a:xfrm>
           <a:prstGeom prst="rect">
             <a:avLst/>
@@ -8979,6 +9018,96 @@
               <a:t>The marking is not checked at all.</a:t>
             </a:r>
             <a:endParaRPr lang="en-US" sz="1350" dirty="0"/>
+          </a:p>
+        </p:txBody>
+      </p:sp>
+      <p:sp>
+        <p:nvSpPr>
+          <p:cNvPr id="20" name="Shape 18"/>
+          <p:cNvSpPr/>
+          <p:nvPr/>
+        </p:nvSpPr>
+        <p:spPr>
+          <a:xfrm>
+            <a:off x="512064" y="5321808"/>
+            <a:ext cx="7973568" cy="887176"/>
+          </a:xfrm>
+          <a:prstGeom prst="roundRect">
+            <a:avLst>
+              <a:gd name="adj" fmla="val 6184"/>
+            </a:avLst>
+          </a:prstGeom>
+          <a:solidFill>
+            <a:srgbClr val="FFFFFF"/>
+          </a:solidFill>
+          <a:ln w="12700">
+            <a:solidFill>
+              <a:srgbClr val="DCE4EF"/>
+            </a:solidFill>
+            <a:prstDash val="solid"/>
+          </a:ln>
+        </p:spPr>
+      </p:sp>
+      <p:pic>
+        <p:nvPicPr>
+          <p:cNvPr id="21" name="Image 0" descr="preencoded.png">    </p:cNvPr>
+          <p:cNvPicPr>
+            <a:picLocks noChangeAspect="1"/>
+          </p:cNvPicPr>
+          <p:nvPr/>
+        </p:nvPicPr>
+        <p:blipFill>
+          <a:blip r:embed="rId1"/>
+          <a:stretch>
+            <a:fillRect/>
+          </a:stretch>
+        </p:blipFill>
+        <p:spPr>
+          <a:xfrm>
+            <a:off x="566928" y="5376672"/>
+            <a:ext cx="7863840" cy="777448"/>
+          </a:xfrm>
+          <a:prstGeom prst="rect">
+            <a:avLst/>
+          </a:prstGeom>
+        </p:spPr>
+      </p:pic>
+      <p:sp>
+        <p:nvSpPr>
+          <p:cNvPr id="22" name="Text 19"/>
+          <p:cNvSpPr txBox="1"/>
+          <p:nvPr/>
+        </p:nvSpPr>
+        <p:spPr>
+          <a:xfrm>
+            <a:off x="8750808" y="5646524"/>
+            <a:ext cx="2834640" cy="237744"/>
+          </a:xfrm>
+          <a:prstGeom prst="rect">
+            <a:avLst/>
+          </a:prstGeom>
+          <a:noFill/>
+          <a:ln/>
+        </p:spPr>
+        <p:txBody>
+          <a:bodyPr wrap="square" lIns="0" tIns="0" rIns="0" bIns="0" rtlCol="0" anchor="ctr"/>
+          <a:lstStyle/>
+          <a:p>
+            <a:pPr indent="0" marL="0">
+              <a:buNone/>
+            </a:pPr>
+            <a:r>
+              <a:rPr lang="en-US" sz="1100" i="1" dirty="0">
+                <a:solidFill>
+                  <a:srgbClr val="8A9AAC"/>
+                </a:solidFill>
+                <a:latin typeface="Calibri" pitchFamily="34" charset="0"/>
+                <a:ea typeface="Calibri" pitchFamily="34" charset="-122"/>
+                <a:cs typeface="Calibri" pitchFamily="34" charset="-120"/>
+              </a:rPr>
+              <a:t>The button carries its own state.</a:t>
+            </a:r>
+            <a:endParaRPr lang="en-US" sz="1100" dirty="0"/>
           </a:p>
         </p:txBody>
       </p:sp>
@@ -9162,7 +9291,7 @@
         <p:spPr>
           <a:xfrm>
             <a:off x="1280160" y="1719072"/>
-            <a:ext cx="5029200" cy="292608"/>
+            <a:ext cx="4846320" cy="292608"/>
           </a:xfrm>
           <a:prstGeom prst="rect">
             <a:avLst/>
@@ -9201,7 +9330,7 @@
         <p:spPr>
           <a:xfrm>
             <a:off x="1280160" y="2039112"/>
-            <a:ext cx="10344607" cy="292608"/>
+            <a:ext cx="5394960" cy="292608"/>
           </a:xfrm>
           <a:prstGeom prst="rect">
             <a:avLst/>
@@ -9306,7 +9435,7 @@
         <p:spPr>
           <a:xfrm>
             <a:off x="1280160" y="2578608"/>
-            <a:ext cx="5029200" cy="292608"/>
+            <a:ext cx="4846320" cy="292608"/>
           </a:xfrm>
           <a:prstGeom prst="rect">
             <a:avLst/>
@@ -9345,7 +9474,7 @@
         <p:spPr>
           <a:xfrm>
             <a:off x="1280160" y="2898648"/>
-            <a:ext cx="10344607" cy="292608"/>
+            <a:ext cx="5394960" cy="292608"/>
           </a:xfrm>
           <a:prstGeom prst="rect">
             <a:avLst/>
@@ -9450,7 +9579,7 @@
         <p:spPr>
           <a:xfrm>
             <a:off x="1280160" y="3438144"/>
-            <a:ext cx="5029200" cy="292608"/>
+            <a:ext cx="4846320" cy="292608"/>
           </a:xfrm>
           <a:prstGeom prst="rect">
             <a:avLst/>
@@ -9489,7 +9618,7 @@
         <p:spPr>
           <a:xfrm>
             <a:off x="1280160" y="3758184"/>
-            <a:ext cx="10344607" cy="292608"/>
+            <a:ext cx="5394960" cy="292608"/>
           </a:xfrm>
           <a:prstGeom prst="rect">
             <a:avLst/>
@@ -9594,7 +9723,7 @@
         <p:spPr>
           <a:xfrm>
             <a:off x="1280160" y="4297680"/>
-            <a:ext cx="5029200" cy="292608"/>
+            <a:ext cx="4846320" cy="292608"/>
           </a:xfrm>
           <a:prstGeom prst="rect">
             <a:avLst/>
@@ -9633,7 +9762,7 @@
         <p:spPr>
           <a:xfrm>
             <a:off x="1280160" y="4617720"/>
-            <a:ext cx="10344607" cy="292608"/>
+            <a:ext cx="5394960" cy="292608"/>
           </a:xfrm>
           <a:prstGeom prst="rect">
             <a:avLst/>
@@ -9738,7 +9867,7 @@
         <p:spPr>
           <a:xfrm>
             <a:off x="1280160" y="5157216"/>
-            <a:ext cx="5029200" cy="292608"/>
+            <a:ext cx="4846320" cy="292608"/>
           </a:xfrm>
           <a:prstGeom prst="rect">
             <a:avLst/>
@@ -9777,7 +9906,7 @@
         <p:spPr>
           <a:xfrm>
             <a:off x="1280160" y="5477256"/>
-            <a:ext cx="10344607" cy="292608"/>
+            <a:ext cx="5394960" cy="292608"/>
           </a:xfrm>
           <a:prstGeom prst="rect">
             <a:avLst/>
@@ -9804,6 +9933,96 @@
               <a:t>This is the judgement the tool has no access to.</a:t>
             </a:r>
             <a:endParaRPr lang="en-US" sz="1350" dirty="0"/>
+          </a:p>
+        </p:txBody>
+      </p:sp>
+      <p:sp>
+        <p:nvSpPr>
+          <p:cNvPr id="24" name="Shape 22"/>
+          <p:cNvSpPr/>
+          <p:nvPr/>
+        </p:nvSpPr>
+        <p:spPr>
+          <a:xfrm>
+            <a:off x="7004304" y="1911096"/>
+            <a:ext cx="4672584" cy="1110445"/>
+          </a:xfrm>
+          <a:prstGeom prst="roundRect">
+            <a:avLst>
+              <a:gd name="adj" fmla="val 4941"/>
+            </a:avLst>
+          </a:prstGeom>
+          <a:solidFill>
+            <a:srgbClr val="FFFFFF"/>
+          </a:solidFill>
+          <a:ln w="12700">
+            <a:solidFill>
+              <a:srgbClr val="DCE4EF"/>
+            </a:solidFill>
+            <a:prstDash val="solid"/>
+          </a:ln>
+        </p:spPr>
+      </p:sp>
+      <p:pic>
+        <p:nvPicPr>
+          <p:cNvPr id="25" name="Image 0" descr="preencoded.png">    </p:cNvPr>
+          <p:cNvPicPr>
+            <a:picLocks noChangeAspect="1"/>
+          </p:cNvPicPr>
+          <p:nvPr/>
+        </p:nvPicPr>
+        <p:blipFill>
+          <a:blip r:embed="rId1"/>
+          <a:stretch>
+            <a:fillRect/>
+          </a:stretch>
+        </p:blipFill>
+        <p:spPr>
+          <a:xfrm>
+            <a:off x="7059168" y="1965960"/>
+            <a:ext cx="4562856" cy="1000717"/>
+          </a:xfrm>
+          <a:prstGeom prst="rect">
+            <a:avLst/>
+          </a:prstGeom>
+        </p:spPr>
+      </p:pic>
+      <p:sp>
+        <p:nvSpPr>
+          <p:cNvPr id="26" name="Text 23"/>
+          <p:cNvSpPr txBox="1"/>
+          <p:nvPr/>
+        </p:nvSpPr>
+        <p:spPr>
+          <a:xfrm>
+            <a:off x="7059168" y="3112981"/>
+            <a:ext cx="4562856" cy="237744"/>
+          </a:xfrm>
+          <a:prstGeom prst="rect">
+            <a:avLst/>
+          </a:prstGeom>
+          <a:noFill/>
+          <a:ln/>
+        </p:spPr>
+        <p:txBody>
+          <a:bodyPr wrap="square" lIns="0" tIns="0" rIns="0" bIns="0" rtlCol="0" anchor="ctr"/>
+          <a:lstStyle/>
+          <a:p>
+            <a:pPr indent="0" marL="0">
+              <a:buNone/>
+            </a:pPr>
+            <a:r>
+              <a:rPr lang="en-US" sz="1100" i="1" dirty="0">
+                <a:solidFill>
+                  <a:srgbClr val="8A9AAC"/>
+                </a:solidFill>
+                <a:latin typeface="Calibri" pitchFamily="34" charset="0"/>
+                <a:ea typeface="Calibri" pitchFamily="34" charset="-122"/>
+                <a:cs typeface="Calibri" pitchFamily="34" charset="-120"/>
+              </a:rPr>
+              <a:t>Step 2, on a real deck.</a:t>
+            </a:r>
+            <a:endParaRPr lang="en-US" sz="1100" dirty="0"/>
           </a:p>
         </p:txBody>
       </p:sp>
@@ -10865,16 +11084,16 @@
         </p:nvSpPr>
         <p:spPr>
           <a:xfrm>
-            <a:off x="566928" y="1737360"/>
-            <a:ext cx="11057839" cy="1874520"/>
+            <a:off x="512064" y="1682496"/>
+            <a:ext cx="11167567" cy="1770940"/>
           </a:xfrm>
           <a:prstGeom prst="roundRect">
             <a:avLst>
-              <a:gd name="adj" fmla="val 3415"/>
+              <a:gd name="adj" fmla="val 3098"/>
             </a:avLst>
           </a:prstGeom>
           <a:solidFill>
-            <a:srgbClr val="F4F7FC"/>
+            <a:srgbClr val="FFFFFF"/>
           </a:solidFill>
           <a:ln w="12700">
             <a:solidFill>
@@ -10884,241 +11103,78 @@
           </a:ln>
         </p:spPr>
       </p:sp>
-      <p:sp>
-        <p:nvSpPr>
-          <p:cNvPr id="5" name="Text 3"/>
-          <p:cNvSpPr txBox="1"/>
-          <p:nvPr/>
-        </p:nvSpPr>
-        <p:spPr>
-          <a:xfrm>
-            <a:off x="896112" y="2011680"/>
-            <a:ext cx="777240" cy="274320"/>
-          </a:xfrm>
-          <a:prstGeom prst="rect">
-            <a:avLst/>
-          </a:prstGeom>
-          <a:noFill/>
-          <a:ln/>
-        </p:spPr>
-        <p:txBody>
-          <a:bodyPr wrap="square" lIns="0" tIns="0" rIns="0" bIns="0" rtlCol="0" anchor="ctr"/>
-          <a:lstStyle/>
-          <a:p>
-            <a:pPr algn="r" indent="0" marL="0">
-              <a:buNone/>
-            </a:pPr>
-            <a:r>
-              <a:rPr lang="en-US" sz="1200" b="1" dirty="0">
-                <a:solidFill>
-                  <a:srgbClr val="5C6B7F"/>
-                </a:solidFill>
-                <a:latin typeface="Calibri" pitchFamily="34" charset="0"/>
-                <a:ea typeface="Calibri" pitchFamily="34" charset="-122"/>
-                <a:cs typeface="Calibri" pitchFamily="34" charset="-120"/>
-              </a:rPr>
-              <a:t>Slide 2</a:t>
-            </a:r>
-            <a:endParaRPr lang="en-US" sz="1200" dirty="0"/>
-          </a:p>
-        </p:txBody>
-      </p:sp>
-      <p:sp>
-        <p:nvSpPr>
-          <p:cNvPr id="6" name="Text 4"/>
-          <p:cNvSpPr txBox="1"/>
-          <p:nvPr/>
-        </p:nvSpPr>
-        <p:spPr>
-          <a:xfrm>
-            <a:off x="1847088" y="2011680"/>
-            <a:ext cx="6949440" cy="292608"/>
-          </a:xfrm>
-          <a:prstGeom prst="rect">
-            <a:avLst/>
-          </a:prstGeom>
-          <a:noFill/>
-          <a:ln/>
-        </p:spPr>
-        <p:txBody>
-          <a:bodyPr wrap="square" lIns="0" tIns="0" rIns="0" bIns="0" rtlCol="0" anchor="ctr"/>
-          <a:lstStyle/>
-          <a:p>
-            <a:pPr indent="0" marL="0">
-              <a:buNone/>
-            </a:pPr>
-            <a:r>
-              <a:rPr lang="en-US" sz="1200" dirty="0">
-                <a:solidFill>
-                  <a:srgbClr val="5C6B7F"/>
-                </a:solidFill>
-                <a:latin typeface="Courier New" pitchFamily="34" charset="0"/>
-                <a:ea typeface="Courier New" pitchFamily="34" charset="-122"/>
-                <a:cs typeface="Courier New" pitchFamily="34" charset="-120"/>
-              </a:rPr>
-              <a:t>…escalation paths are undocumented. The </a:t>
-            </a:r>
-            <a:pPr indent="0" marL="0">
-              <a:buNone/>
-            </a:pPr>
-            <a:r>
-              <a:rPr lang="en-US" sz="1200" b="1" dirty="0">
-                <a:solidFill>
-                  <a:srgbClr val="4A3300"/>
-                </a:solidFill>
-                <a:highlight>
-                  <a:srgbClr val="FFE28A"/>
-                </a:highlight>
-                <a:latin typeface="Courier New" pitchFamily="34" charset="0"/>
-                <a:ea typeface="Courier New" pitchFamily="34" charset="-122"/>
-                <a:cs typeface="Courier New" pitchFamily="34" charset="-120"/>
-              </a:rPr>
-              <a:t>organization</a:t>
-            </a:r>
-            <a:pPr indent="0" marL="0">
-              <a:buNone/>
-            </a:pPr>
-            <a:r>
-              <a:rPr lang="en-US" sz="1200" dirty="0">
-                <a:solidFill>
-                  <a:srgbClr val="5C6B7F"/>
-                </a:solidFill>
-                <a:latin typeface="Courier New" pitchFamily="34" charset="0"/>
-                <a:ea typeface="Courier New" pitchFamily="34" charset="-122"/>
-                <a:cs typeface="Courier New" pitchFamily="34" charset="-120"/>
-              </a:rPr>
-              <a:t> should prioritise…</a:t>
-            </a:r>
-            <a:endParaRPr lang="en-US" sz="1200" dirty="0"/>
-          </a:p>
-        </p:txBody>
-      </p:sp>
-      <p:sp>
-        <p:nvSpPr>
-          <p:cNvPr id="7" name="Text 5"/>
-          <p:cNvSpPr txBox="1"/>
-          <p:nvPr/>
-        </p:nvSpPr>
-        <p:spPr>
-          <a:xfrm>
-            <a:off x="8979408" y="2011680"/>
-            <a:ext cx="2286000" cy="292608"/>
-          </a:xfrm>
-          <a:prstGeom prst="rect">
-            <a:avLst/>
-          </a:prstGeom>
-          <a:noFill/>
-          <a:ln/>
-        </p:spPr>
-        <p:txBody>
-          <a:bodyPr wrap="square" lIns="0" tIns="0" rIns="0" bIns="0" rtlCol="0" anchor="ctr"/>
-          <a:lstStyle/>
-          <a:p>
-            <a:pPr indent="0" marL="0">
-              <a:buNone/>
-            </a:pPr>
-            <a:r>
-              <a:rPr lang="en-US" sz="1350" b="1" dirty="0">
-                <a:solidFill>
-                  <a:srgbClr val="1A7F52"/>
-                </a:solidFill>
-                <a:latin typeface="Calibri" pitchFamily="34" charset="0"/>
-                <a:ea typeface="Calibri" pitchFamily="34" charset="-122"/>
-                <a:cs typeface="Calibri" pitchFamily="34" charset="-120"/>
-              </a:rPr>
-              <a:t>→  organisation</a:t>
-            </a:r>
-            <a:endParaRPr lang="en-US" sz="1350" dirty="0"/>
-          </a:p>
-        </p:txBody>
-      </p:sp>
-      <p:sp>
-        <p:nvSpPr>
-          <p:cNvPr id="8" name="Text 6"/>
-          <p:cNvSpPr txBox="1"/>
-          <p:nvPr/>
-        </p:nvSpPr>
-        <p:spPr>
-          <a:xfrm>
-            <a:off x="1847088" y="2395728"/>
-            <a:ext cx="8229600" cy="274320"/>
-          </a:xfrm>
-          <a:prstGeom prst="rect">
-            <a:avLst/>
-          </a:prstGeom>
-          <a:noFill/>
-          <a:ln/>
-        </p:spPr>
-        <p:txBody>
-          <a:bodyPr wrap="square" lIns="0" tIns="0" rIns="0" bIns="0" rtlCol="0" anchor="ctr"/>
-          <a:lstStyle/>
-          <a:p>
-            <a:pPr indent="0" marL="0">
-              <a:buNone/>
-            </a:pPr>
-            <a:r>
-              <a:rPr lang="en-US" sz="1250" dirty="0">
-                <a:solidFill>
-                  <a:srgbClr val="5C6B7F"/>
-                </a:solidFill>
-                <a:latin typeface="Calibri" pitchFamily="34" charset="0"/>
-                <a:ea typeface="Calibri" pitchFamily="34" charset="-122"/>
-                <a:cs typeface="Calibri" pitchFamily="34" charset="-120"/>
-              </a:rPr>
-              <a:t>"organization" is American spelling; this report is British.</a:t>
-            </a:r>
-            <a:endParaRPr lang="en-US" sz="1250" dirty="0"/>
-          </a:p>
-        </p:txBody>
-      </p:sp>
-      <p:sp>
-        <p:nvSpPr>
-          <p:cNvPr id="9" name="Text 7"/>
-          <p:cNvSpPr txBox="1"/>
-          <p:nvPr/>
-        </p:nvSpPr>
-        <p:spPr>
-          <a:xfrm>
-            <a:off x="1847088" y="2688336"/>
-            <a:ext cx="8229600" cy="256032"/>
-          </a:xfrm>
-          <a:prstGeom prst="rect">
-            <a:avLst/>
-          </a:prstGeom>
-          <a:noFill/>
-          <a:ln/>
-        </p:spPr>
-        <p:txBody>
-          <a:bodyPr wrap="square" lIns="0" tIns="0" rIns="0" bIns="0" rtlCol="0" anchor="ctr"/>
-          <a:lstStyle/>
-          <a:p>
-            <a:pPr indent="0" marL="0">
-              <a:buNone/>
-            </a:pPr>
-            <a:r>
-              <a:rPr lang="en-US" sz="1050" dirty="0">
-                <a:solidFill>
-                  <a:srgbClr val="93A3B5"/>
-                </a:solidFill>
-                <a:latin typeface="Calibri" pitchFamily="34" charset="0"/>
-                <a:ea typeface="Calibri" pitchFamily="34" charset="-122"/>
-                <a:cs typeface="Calibri" pitchFamily="34" charset="-120"/>
-              </a:rPr>
-              <a:t>DIALECT · dialect/mixed-spelling</a:t>
-            </a:r>
-            <a:endParaRPr lang="en-US" sz="1050" dirty="0"/>
-          </a:p>
-        </p:txBody>
-      </p:sp>
-      <p:sp>
-        <p:nvSpPr>
-          <p:cNvPr id="10" name="Text 8"/>
-          <p:cNvSpPr txBox="1"/>
-          <p:nvPr/>
-        </p:nvSpPr>
-        <p:spPr>
-          <a:xfrm>
-            <a:off x="566928" y="3931920"/>
+      <p:pic>
+        <p:nvPicPr>
+          <p:cNvPr id="5" name="Image 0" descr="preencoded.png">    </p:cNvPr>
+          <p:cNvPicPr>
+            <a:picLocks noChangeAspect="1"/>
+          </p:cNvPicPr>
+          <p:nvPr/>
+        </p:nvPicPr>
+        <p:blipFill>
+          <a:blip r:embed="rId1"/>
+          <a:stretch>
+            <a:fillRect/>
+          </a:stretch>
+        </p:blipFill>
+        <p:spPr>
+          <a:xfrm>
+            <a:off x="566928" y="1737360"/>
+            <a:ext cx="11057839" cy="1661212"/>
+          </a:xfrm>
+          <a:prstGeom prst="rect">
+            <a:avLst/>
+          </a:prstGeom>
+        </p:spPr>
+      </p:pic>
+      <p:sp>
+        <p:nvSpPr>
+          <p:cNvPr id="6" name="Text 3"/>
+          <p:cNvSpPr txBox="1"/>
+          <p:nvPr/>
+        </p:nvSpPr>
+        <p:spPr>
+          <a:xfrm>
+            <a:off x="566928" y="3544876"/>
+            <a:ext cx="11057839" cy="237744"/>
+          </a:xfrm>
+          <a:prstGeom prst="rect">
+            <a:avLst/>
+          </a:prstGeom>
+          <a:noFill/>
+          <a:ln/>
+        </p:spPr>
+        <p:txBody>
+          <a:bodyPr wrap="square" lIns="0" tIns="0" rIns="0" bIns="0" rtlCol="0" anchor="ctr"/>
+          <a:lstStyle/>
+          <a:p>
+            <a:pPr indent="0" marL="0">
+              <a:buNone/>
+            </a:pPr>
+            <a:r>
+              <a:rPr lang="en-US" sz="1100" i="1" dirty="0">
+                <a:solidFill>
+                  <a:srgbClr val="8A9AAC"/>
+                </a:solidFill>
+                <a:latin typeface="Calibri" pitchFamily="34" charset="0"/>
+                <a:ea typeface="Calibri" pitchFamily="34" charset="-122"/>
+                <a:cs typeface="Calibri" pitchFamily="34" charset="-120"/>
+              </a:rPr>
+              <a:t>The tool, on our sample deck.</a:t>
+            </a:r>
+            <a:endParaRPr lang="en-US" sz="1100" dirty="0"/>
+          </a:p>
+        </p:txBody>
+      </p:sp>
+      <p:sp>
+        <p:nvSpPr>
+          <p:cNvPr id="7" name="Text 4"/>
+          <p:cNvSpPr txBox="1"/>
+          <p:nvPr/>
+        </p:nvSpPr>
+        <p:spPr>
+          <a:xfrm>
+            <a:off x="566928" y="4069080"/>
             <a:ext cx="5346040" cy="274320"/>
           </a:xfrm>
           <a:prstGeom prst="rect">
@@ -11151,13 +11207,13 @@
       </p:sp>
       <p:sp>
         <p:nvSpPr>
-          <p:cNvPr id="11" name="Text 9"/>
-          <p:cNvSpPr txBox="1"/>
-          <p:nvPr/>
-        </p:nvSpPr>
-        <p:spPr>
-          <a:xfrm>
-            <a:off x="566928" y="4224528"/>
+          <p:cNvPr id="8" name="Text 5"/>
+          <p:cNvSpPr txBox="1"/>
+          <p:nvPr/>
+        </p:nvSpPr>
+        <p:spPr>
+          <a:xfrm>
+            <a:off x="566928" y="4361688"/>
             <a:ext cx="5346040" cy="566928"/>
           </a:xfrm>
           <a:prstGeom prst="rect">
@@ -11193,13 +11249,13 @@
       </p:sp>
       <p:sp>
         <p:nvSpPr>
-          <p:cNvPr id="12" name="Text 10"/>
-          <p:cNvSpPr txBox="1"/>
-          <p:nvPr/>
-        </p:nvSpPr>
-        <p:spPr>
-          <a:xfrm>
-            <a:off x="6278728" y="3931920"/>
+          <p:cNvPr id="9" name="Text 6"/>
+          <p:cNvSpPr txBox="1"/>
+          <p:nvPr/>
+        </p:nvSpPr>
+        <p:spPr>
+          <a:xfrm>
+            <a:off x="6278728" y="4069080"/>
             <a:ext cx="5346040" cy="274320"/>
           </a:xfrm>
           <a:prstGeom prst="rect">
@@ -11232,13 +11288,13 @@
       </p:sp>
       <p:sp>
         <p:nvSpPr>
-          <p:cNvPr id="13" name="Text 11"/>
-          <p:cNvSpPr txBox="1"/>
-          <p:nvPr/>
-        </p:nvSpPr>
-        <p:spPr>
-          <a:xfrm>
-            <a:off x="6278728" y="4224528"/>
+          <p:cNvPr id="10" name="Text 7"/>
+          <p:cNvSpPr txBox="1"/>
+          <p:nvPr/>
+        </p:nvSpPr>
+        <p:spPr>
+          <a:xfrm>
+            <a:off x="6278728" y="4361688"/>
             <a:ext cx="5346040" cy="566928"/>
           </a:xfrm>
           <a:prstGeom prst="rect">
@@ -11274,13 +11330,13 @@
       </p:sp>
       <p:sp>
         <p:nvSpPr>
-          <p:cNvPr id="14" name="Text 12"/>
-          <p:cNvSpPr txBox="1"/>
-          <p:nvPr/>
-        </p:nvSpPr>
-        <p:spPr>
-          <a:xfrm>
-            <a:off x="566928" y="5029200"/>
+          <p:cNvPr id="11" name="Text 8"/>
+          <p:cNvSpPr txBox="1"/>
+          <p:nvPr/>
+        </p:nvSpPr>
+        <p:spPr>
+          <a:xfrm>
+            <a:off x="566928" y="5166360"/>
             <a:ext cx="5346040" cy="274320"/>
           </a:xfrm>
           <a:prstGeom prst="rect">
@@ -11313,13 +11369,13 @@
       </p:sp>
       <p:sp>
         <p:nvSpPr>
-          <p:cNvPr id="15" name="Text 13"/>
-          <p:cNvSpPr txBox="1"/>
-          <p:nvPr/>
-        </p:nvSpPr>
-        <p:spPr>
-          <a:xfrm>
-            <a:off x="566928" y="5321808"/>
+          <p:cNvPr id="12" name="Text 9"/>
+          <p:cNvSpPr txBox="1"/>
+          <p:nvPr/>
+        </p:nvSpPr>
+        <p:spPr>
+          <a:xfrm>
+            <a:off x="566928" y="5458968"/>
             <a:ext cx="5346040" cy="566928"/>
           </a:xfrm>
           <a:prstGeom prst="rect">
@@ -11355,13 +11411,13 @@
       </p:sp>
       <p:sp>
         <p:nvSpPr>
-          <p:cNvPr id="16" name="Text 14"/>
-          <p:cNvSpPr txBox="1"/>
-          <p:nvPr/>
-        </p:nvSpPr>
-        <p:spPr>
-          <a:xfrm>
-            <a:off x="6278728" y="5029200"/>
+          <p:cNvPr id="13" name="Text 10"/>
+          <p:cNvSpPr txBox="1"/>
+          <p:nvPr/>
+        </p:nvSpPr>
+        <p:spPr>
+          <a:xfrm>
+            <a:off x="6278728" y="5166360"/>
             <a:ext cx="5346040" cy="274320"/>
           </a:xfrm>
           <a:prstGeom prst="rect">
@@ -11394,13 +11450,13 @@
       </p:sp>
       <p:sp>
         <p:nvSpPr>
-          <p:cNvPr id="17" name="Text 15"/>
-          <p:cNvSpPr txBox="1"/>
-          <p:nvPr/>
-        </p:nvSpPr>
-        <p:spPr>
-          <a:xfrm>
-            <a:off x="6278728" y="5321808"/>
+          <p:cNvPr id="14" name="Text 11"/>
+          <p:cNvSpPr txBox="1"/>
+          <p:nvPr/>
+        </p:nvSpPr>
+        <p:spPr>
+          <a:xfrm>
+            <a:off x="6278728" y="5458968"/>
             <a:ext cx="5346040" cy="566928"/>
           </a:xfrm>
           <a:prstGeom prst="rect">
@@ -11880,16 +11936,16 @@
         </p:nvSpPr>
         <p:spPr>
           <a:xfrm>
-            <a:off x="566928" y="4343400"/>
-            <a:ext cx="11057839" cy="1371600"/>
+            <a:off x="512064" y="4471416"/>
+            <a:ext cx="11167567" cy="769140"/>
           </a:xfrm>
           <a:prstGeom prst="roundRect">
             <a:avLst>
-              <a:gd name="adj" fmla="val 4667"/>
+              <a:gd name="adj" fmla="val 7133"/>
             </a:avLst>
           </a:prstGeom>
           <a:solidFill>
-            <a:srgbClr val="F4F7FC"/>
+            <a:srgbClr val="FFFFFF"/>
           </a:solidFill>
           <a:ln w="12700">
             <a:solidFill>
@@ -11899,282 +11955,66 @@
           </a:ln>
         </p:spPr>
       </p:sp>
-      <p:sp>
-        <p:nvSpPr>
-          <p:cNvPr id="14" name="Text 12"/>
-          <p:cNvSpPr txBox="1"/>
-          <p:nvPr/>
-        </p:nvSpPr>
-        <p:spPr>
-          <a:xfrm>
-            <a:off x="950976" y="4617720"/>
-            <a:ext cx="4754880" cy="310896"/>
-          </a:xfrm>
-          <a:prstGeom prst="rect">
-            <a:avLst/>
-          </a:prstGeom>
-          <a:noFill/>
-          <a:ln/>
-        </p:spPr>
-        <p:txBody>
-          <a:bodyPr wrap="square" lIns="0" tIns="0" rIns="0" bIns="0" rtlCol="0" anchor="ctr"/>
-          <a:lstStyle/>
-          <a:p>
-            <a:pPr indent="0" marL="0">
-              <a:buNone/>
-            </a:pPr>
-            <a:r>
-              <a:rPr lang="en-US" sz="1500" b="1" dirty="0">
-                <a:solidFill>
-                  <a:srgbClr val="0B1622"/>
-                </a:solidFill>
-                <a:latin typeface="Calibri" pitchFamily="34" charset="0"/>
-                <a:ea typeface="Calibri" pitchFamily="34" charset="-122"/>
-                <a:cs typeface="Calibri" pitchFamily="34" charset="-120"/>
-              </a:rPr>
-              <a:t>Internal remarks in the speaker notes</a:t>
-            </a:r>
-            <a:endParaRPr lang="en-US" sz="1500" dirty="0"/>
-          </a:p>
-        </p:txBody>
-      </p:sp>
-      <p:sp>
-        <p:nvSpPr>
-          <p:cNvPr id="15" name="Shape 13"/>
-          <p:cNvSpPr/>
-          <p:nvPr/>
-        </p:nvSpPr>
-        <p:spPr>
-          <a:xfrm>
-            <a:off x="5797296" y="4636008"/>
-            <a:ext cx="384048" cy="292608"/>
-          </a:xfrm>
-          <a:prstGeom prst="roundRect">
-            <a:avLst>
-              <a:gd name="adj" fmla="val 50000"/>
-            </a:avLst>
-          </a:prstGeom>
-          <a:solidFill>
-            <a:srgbClr val="E4EAF2"/>
-          </a:solidFill>
-          <a:ln w="12700">
-            <a:solidFill>
-              <a:srgbClr val="E4EAF2"/>
-            </a:solidFill>
-            <a:prstDash val="solid"/>
-          </a:ln>
-        </p:spPr>
-      </p:sp>
-      <p:sp>
-        <p:nvSpPr>
-          <p:cNvPr id="16" name="Text 14"/>
-          <p:cNvSpPr txBox="1"/>
-          <p:nvPr/>
-        </p:nvSpPr>
-        <p:spPr>
-          <a:xfrm>
-            <a:off x="5797296" y="4636008"/>
-            <a:ext cx="384048" cy="292608"/>
-          </a:xfrm>
-          <a:prstGeom prst="rect">
-            <a:avLst/>
-          </a:prstGeom>
-          <a:noFill/>
-          <a:ln/>
-        </p:spPr>
-        <p:txBody>
-          <a:bodyPr wrap="square" lIns="0" tIns="0" rIns="0" bIns="0" rtlCol="0" anchor="ctr"/>
-          <a:lstStyle/>
-          <a:p>
-            <a:pPr algn="ctr" indent="0" marL="0">
-              <a:buNone/>
-            </a:pPr>
-            <a:r>
-              <a:rPr lang="en-US" sz="1050" b="1" spc="60" kern="0" dirty="0">
-                <a:solidFill>
-                  <a:srgbClr val="5C6B7F"/>
-                </a:solidFill>
-                <a:latin typeface="Calibri" pitchFamily="34" charset="0"/>
-                <a:ea typeface="Calibri" pitchFamily="34" charset="-122"/>
-                <a:cs typeface="Calibri" pitchFamily="34" charset="-120"/>
-              </a:rPr>
-              <a:t>4</a:t>
-            </a:r>
-            <a:endParaRPr lang="en-US" sz="1050" dirty="0"/>
-          </a:p>
-        </p:txBody>
-      </p:sp>
-      <p:sp>
-        <p:nvSpPr>
-          <p:cNvPr id="17" name="Text 15"/>
-          <p:cNvSpPr txBox="1"/>
-          <p:nvPr/>
-        </p:nvSpPr>
-        <p:spPr>
-          <a:xfrm>
-            <a:off x="6373368" y="4617720"/>
-            <a:ext cx="4937760" cy="310896"/>
-          </a:xfrm>
-          <a:prstGeom prst="rect">
-            <a:avLst/>
-          </a:prstGeom>
-          <a:noFill/>
-          <a:ln/>
-        </p:spPr>
-        <p:txBody>
-          <a:bodyPr wrap="square" lIns="0" tIns="0" rIns="0" bIns="0" rtlCol="0" anchor="ctr"/>
-          <a:lstStyle/>
-          <a:p>
-            <a:pPr indent="0" marL="0">
-              <a:buNone/>
-            </a:pPr>
-            <a:r>
-              <a:rPr lang="en-US" sz="1250" dirty="0">
-                <a:solidFill>
-                  <a:srgbClr val="4A3300"/>
-                </a:solidFill>
-                <a:highlight>
-                  <a:srgbClr val="FFE28A"/>
-                </a:highlight>
-                <a:latin typeface="Calibri" pitchFamily="34" charset="0"/>
-                <a:ea typeface="Calibri" pitchFamily="34" charset="-122"/>
-                <a:cs typeface="Calibri" pitchFamily="34" charset="-120"/>
-              </a:rPr>
-              <a:t>Don't mention</a:t>
-            </a:r>
-            <a:pPr indent="0" marL="0">
-              <a:buNone/>
-            </a:pPr>
-            <a:r>
-              <a:rPr lang="en-US" sz="1250" dirty="0">
-                <a:solidFill>
-                  <a:srgbClr val="5C6B7F"/>
-                </a:solidFill>
-                <a:latin typeface="Calibri" pitchFamily="34" charset="0"/>
-                <a:ea typeface="Calibri" pitchFamily="34" charset="-122"/>
-                <a:cs typeface="Calibri" pitchFamily="34" charset="-120"/>
-              </a:rPr>
-              <a:t>,  </a:t>
-            </a:r>
-            <a:pPr indent="0" marL="0">
-              <a:buNone/>
-            </a:pPr>
-            <a:r>
-              <a:rPr lang="en-US" sz="1250" dirty="0">
-                <a:solidFill>
-                  <a:srgbClr val="4A3300"/>
-                </a:solidFill>
-                <a:highlight>
-                  <a:srgbClr val="FFE28A"/>
-                </a:highlight>
-                <a:latin typeface="Calibri" pitchFamily="34" charset="0"/>
-                <a:ea typeface="Calibri" pitchFamily="34" charset="-122"/>
-                <a:cs typeface="Calibri" pitchFamily="34" charset="-120"/>
-              </a:rPr>
-              <a:t>day rate</a:t>
-            </a:r>
-            <a:pPr indent="0" marL="0">
-              <a:buNone/>
-            </a:pPr>
-            <a:r>
-              <a:rPr lang="en-US" sz="1250" dirty="0">
-                <a:solidFill>
-                  <a:srgbClr val="5C6B7F"/>
-                </a:solidFill>
-                <a:latin typeface="Calibri" pitchFamily="34" charset="0"/>
-                <a:ea typeface="Calibri" pitchFamily="34" charset="-122"/>
-                <a:cs typeface="Calibri" pitchFamily="34" charset="-120"/>
-              </a:rPr>
-              <a:t>,  </a:t>
-            </a:r>
-            <a:pPr indent="0" marL="0">
-              <a:buNone/>
-            </a:pPr>
-            <a:r>
-              <a:rPr lang="en-US" sz="1250" dirty="0">
-                <a:solidFill>
-                  <a:srgbClr val="4A3300"/>
-                </a:solidFill>
-                <a:highlight>
-                  <a:srgbClr val="FFE28A"/>
-                </a:highlight>
-                <a:latin typeface="Calibri" pitchFamily="34" charset="0"/>
-                <a:ea typeface="Calibri" pitchFamily="34" charset="-122"/>
-                <a:cs typeface="Calibri" pitchFamily="34" charset="-120"/>
-              </a:rPr>
-              <a:t>push them for more</a:t>
-            </a:r>
-            <a:pPr indent="0" marL="0">
-              <a:buNone/>
-            </a:pPr>
-            <a:r>
-              <a:rPr lang="en-US" sz="1250" dirty="0">
-                <a:solidFill>
-                  <a:srgbClr val="5C6B7F"/>
-                </a:solidFill>
-                <a:latin typeface="Calibri" pitchFamily="34" charset="0"/>
-                <a:ea typeface="Calibri" pitchFamily="34" charset="-122"/>
-                <a:cs typeface="Calibri" pitchFamily="34" charset="-120"/>
-              </a:rPr>
-              <a:t>,  </a:t>
-            </a:r>
-            <a:pPr indent="0" marL="0">
-              <a:buNone/>
-            </a:pPr>
-            <a:r>
-              <a:rPr lang="en-US" sz="1250" dirty="0">
-                <a:solidFill>
-                  <a:srgbClr val="4A3300"/>
-                </a:solidFill>
-                <a:highlight>
-                  <a:srgbClr val="FFE28A"/>
-                </a:highlight>
-                <a:latin typeface="Calibri" pitchFamily="34" charset="0"/>
-                <a:ea typeface="Calibri" pitchFamily="34" charset="-122"/>
-                <a:cs typeface="Calibri" pitchFamily="34" charset="-120"/>
-              </a:rPr>
-              <a:t>guesstimate</a:t>
-            </a:r>
-            <a:endParaRPr lang="en-US" sz="1250" dirty="0"/>
-          </a:p>
-        </p:txBody>
-      </p:sp>
-      <p:sp>
-        <p:nvSpPr>
-          <p:cNvPr id="18" name="Text 16"/>
-          <p:cNvSpPr txBox="1"/>
-          <p:nvPr/>
-        </p:nvSpPr>
-        <p:spPr>
-          <a:xfrm>
-            <a:off x="950976" y="5029200"/>
-            <a:ext cx="10289743" cy="274320"/>
-          </a:xfrm>
-          <a:prstGeom prst="rect">
-            <a:avLst/>
-          </a:prstGeom>
-          <a:noFill/>
-          <a:ln/>
-        </p:spPr>
-        <p:txBody>
-          <a:bodyPr wrap="square" lIns="0" tIns="0" rIns="0" bIns="0" rtlCol="0" anchor="ctr"/>
-          <a:lstStyle/>
-          <a:p>
-            <a:pPr indent="0" marL="0">
-              <a:buNone/>
-            </a:pPr>
-            <a:r>
-              <a:rPr lang="en-US" sz="1250" i="1" dirty="0">
-                <a:solidFill>
-                  <a:srgbClr val="5C6B7F"/>
-                </a:solidFill>
-                <a:latin typeface="Calibri" pitchFamily="34" charset="0"/>
-                <a:ea typeface="Calibri" pitchFamily="34" charset="-122"/>
-                <a:cs typeface="Calibri" pitchFamily="34" charset="-120"/>
-              </a:rPr>
-              <a:t>One collapsed row, four places. You can judge that without opening it.</a:t>
-            </a:r>
-            <a:endParaRPr lang="en-US" sz="1250" dirty="0"/>
+      <p:pic>
+        <p:nvPicPr>
+          <p:cNvPr id="14" name="Image 0" descr="preencoded.png">    </p:cNvPr>
+          <p:cNvPicPr>
+            <a:picLocks noChangeAspect="1"/>
+          </p:cNvPicPr>
+          <p:nvPr/>
+        </p:nvPicPr>
+        <p:blipFill>
+          <a:blip r:embed="rId1"/>
+          <a:stretch>
+            <a:fillRect/>
+          </a:stretch>
+        </p:blipFill>
+        <p:spPr>
+          <a:xfrm>
+            <a:off x="566928" y="4526280"/>
+            <a:ext cx="11057839" cy="659412"/>
+          </a:xfrm>
+          <a:prstGeom prst="rect">
+            <a:avLst/>
+          </a:prstGeom>
+        </p:spPr>
+      </p:pic>
+      <p:sp>
+        <p:nvSpPr>
+          <p:cNvPr id="15" name="Text 12"/>
+          <p:cNvSpPr txBox="1"/>
+          <p:nvPr/>
+        </p:nvSpPr>
+        <p:spPr>
+          <a:xfrm>
+            <a:off x="566928" y="5350284"/>
+            <a:ext cx="11057839" cy="237744"/>
+          </a:xfrm>
+          <a:prstGeom prst="rect">
+            <a:avLst/>
+          </a:prstGeom>
+          <a:noFill/>
+          <a:ln/>
+        </p:spPr>
+        <p:txBody>
+          <a:bodyPr wrap="square" lIns="0" tIns="0" rIns="0" bIns="0" rtlCol="0" anchor="ctr"/>
+          <a:lstStyle/>
+          <a:p>
+            <a:pPr indent="0" marL="0">
+              <a:buNone/>
+            </a:pPr>
+            <a:r>
+              <a:rPr lang="en-US" sz="1100" i="1" dirty="0">
+                <a:solidFill>
+                  <a:srgbClr val="8A9AAC"/>
+                </a:solidFill>
+                <a:latin typeface="Calibri" pitchFamily="34" charset="0"/>
+                <a:ea typeface="Calibri" pitchFamily="34" charset="-122"/>
+                <a:cs typeface="Calibri" pitchFamily="34" charset="-120"/>
+              </a:rPr>
+              <a:t>One row, six places. Often enough to judge without opening it.</a:t>
+            </a:r>
+            <a:endParaRPr lang="en-US" sz="1100" dirty="0"/>
           </a:p>
         </p:txBody>
       </p:sp>
@@ -12546,8 +12386,8 @@
         </p:nvSpPr>
         <p:spPr>
           <a:xfrm>
-            <a:off x="658368" y="3931920"/>
-            <a:ext cx="10874959" cy="1737360"/>
+            <a:off x="658368" y="3913632"/>
+            <a:ext cx="10874959" cy="1161288"/>
           </a:xfrm>
           <a:prstGeom prst="rect">
             <a:avLst/>
@@ -12561,13 +12401,13 @@
           <a:p>
             <a:pPr marL="342900" indent="-342900">
               <a:spcAft>
-                <a:spcPts val="700"/>
+                <a:spcPts val="500"/>
               </a:spcAft>
               <a:buSzPct val="100000"/>
               <a:buChar char="•"/>
             </a:pPr>
             <a:r>
-              <a:rPr lang="en-US" sz="1400" dirty="0">
+              <a:rPr lang="en-US" sz="1350" dirty="0">
                 <a:solidFill>
                   <a:srgbClr val="5C6B7F"/>
                 </a:solidFill>
@@ -12577,18 +12417,18 @@
               </a:rPr>
               <a:t>It collects in an Ignored section at the foot of the list, with Restore on each.</a:t>
             </a:r>
-            <a:endParaRPr lang="en-US" sz="1400" dirty="0"/>
+            <a:endParaRPr lang="en-US" sz="1350" dirty="0"/>
           </a:p>
           <a:p>
             <a:pPr marL="342900" indent="-342900">
               <a:spcAft>
-                <a:spcPts val="700"/>
+                <a:spcPts val="500"/>
               </a:spcAft>
               <a:buSzPct val="100000"/>
               <a:buChar char="•"/>
             </a:pPr>
             <a:r>
-              <a:rPr lang="en-US" sz="1400" dirty="0">
+              <a:rPr lang="en-US" sz="1350" dirty="0">
                 <a:solidFill>
                   <a:srgbClr val="5C6B7F"/>
                 </a:solidFill>
@@ -12598,18 +12438,18 @@
               </a:rPr>
               <a:t>The running total sits under the verdict, so a verdict reached by ignoring never looks like one reached by fixing.</a:t>
             </a:r>
-            <a:endParaRPr lang="en-US" sz="1400" dirty="0"/>
+            <a:endParaRPr lang="en-US" sz="1350" dirty="0"/>
           </a:p>
           <a:p>
             <a:pPr marL="342900" indent="-342900">
               <a:spcAft>
-                <a:spcPts val="700"/>
+                <a:spcPts val="500"/>
               </a:spcAft>
               <a:buSzPct val="100000"/>
               <a:buChar char="•"/>
             </a:pPr>
             <a:r>
-              <a:rPr lang="en-US" sz="1400" dirty="0">
+              <a:rPr lang="en-US" sz="1350" dirty="0">
                 <a:solidFill>
                   <a:srgbClr val="5C6B7F"/>
                 </a:solidFill>
@@ -12619,18 +12459,18 @@
               </a:rPr>
               <a:t>Every copied format states how many were left out.</a:t>
             </a:r>
-            <a:endParaRPr lang="en-US" sz="1400" dirty="0"/>
+            <a:endParaRPr lang="en-US" sz="1350" dirty="0"/>
           </a:p>
           <a:p>
             <a:pPr marL="342900" indent="-342900">
               <a:spcAft>
-                <a:spcPts val="700"/>
+                <a:spcPts val="500"/>
               </a:spcAft>
               <a:buSzPct val="100000"/>
               <a:buChar char="•"/>
             </a:pPr>
             <a:r>
-              <a:rPr lang="en-US" sz="1400" dirty="0">
+              <a:rPr lang="en-US" sz="1350" dirty="0">
                 <a:solidFill>
                   <a:srgbClr val="5C6B7F"/>
                 </a:solidFill>
@@ -12640,10 +12480,61 @@
               </a:rPr>
               <a:t>Your decisions survive re-checking the same draft after a round of edits – but are never written to disk, because the keys would carry client text into browser storage.</a:t>
             </a:r>
-            <a:endParaRPr lang="en-US" sz="1400" dirty="0"/>
-          </a:p>
-        </p:txBody>
-      </p:sp>
+            <a:endParaRPr lang="en-US" sz="1350" dirty="0"/>
+          </a:p>
+        </p:txBody>
+      </p:sp>
+      <p:sp>
+        <p:nvSpPr>
+          <p:cNvPr id="12" name="Shape 10"/>
+          <p:cNvSpPr/>
+          <p:nvPr/>
+        </p:nvSpPr>
+        <p:spPr>
+          <a:xfrm>
+            <a:off x="822960" y="5120640"/>
+            <a:ext cx="10533888" cy="1173662"/>
+          </a:xfrm>
+          <a:prstGeom prst="roundRect">
+            <a:avLst>
+              <a:gd name="adj" fmla="val 4675"/>
+            </a:avLst>
+          </a:prstGeom>
+          <a:solidFill>
+            <a:srgbClr val="FFFFFF"/>
+          </a:solidFill>
+          <a:ln w="12700">
+            <a:solidFill>
+              <a:srgbClr val="DCE4EF"/>
+            </a:solidFill>
+            <a:prstDash val="solid"/>
+          </a:ln>
+        </p:spPr>
+      </p:sp>
+      <p:pic>
+        <p:nvPicPr>
+          <p:cNvPr id="13" name="Image 0" descr="preencoded.png">    </p:cNvPr>
+          <p:cNvPicPr>
+            <a:picLocks noChangeAspect="1"/>
+          </p:cNvPicPr>
+          <p:nvPr/>
+        </p:nvPicPr>
+        <p:blipFill>
+          <a:blip r:embed="rId1"/>
+          <a:stretch>
+            <a:fillRect/>
+          </a:stretch>
+        </p:blipFill>
+        <p:spPr>
+          <a:xfrm>
+            <a:off x="877824" y="5175504"/>
+            <a:ext cx="10424160" cy="1063934"/>
+          </a:xfrm>
+          <a:prstGeom prst="rect">
+            <a:avLst/>
+          </a:prstGeom>
+        </p:spPr>
+      </p:pic>
     </p:spTree>
   </p:cSld>
   <p:clrMapOvr>

--- a/Report QA - team walkthrough.pptx
+++ b/Report QA - team walkthrough.pptx
@@ -3024,11 +3024,11 @@
         <p:spPr>
           <a:xfrm>
             <a:off x="1188720" y="4425696"/>
-            <a:ext cx="9802368" cy="1167107"/>
+            <a:ext cx="9802368" cy="872850"/>
           </a:xfrm>
           <a:prstGeom prst="roundRect">
             <a:avLst>
-              <a:gd name="adj" fmla="val 4701"/>
+              <a:gd name="adj" fmla="val 6286"/>
             </a:avLst>
           </a:prstGeom>
           <a:solidFill>
@@ -3059,7 +3059,7 @@
         <p:spPr>
           <a:xfrm>
             <a:off x="1243584" y="4480560"/>
-            <a:ext cx="9692640" cy="1057379"/>
+            <a:ext cx="9692640" cy="763122"/>
           </a:xfrm>
           <a:prstGeom prst="rect">
             <a:avLst/>
@@ -3074,7 +3074,7 @@
         </p:nvSpPr>
         <p:spPr>
           <a:xfrm>
-            <a:off x="566928" y="5720819"/>
+            <a:off x="566928" y="5426562"/>
             <a:ext cx="11057839" cy="640080"/>
           </a:xfrm>
           <a:prstGeom prst="roundRect">
@@ -3101,7 +3101,7 @@
         </p:nvSpPr>
         <p:spPr>
           <a:xfrm>
-            <a:off x="896112" y="5720819"/>
+            <a:off x="896112" y="5426562"/>
             <a:ext cx="10399471" cy="640080"/>
           </a:xfrm>
           <a:prstGeom prst="rect">
@@ -9030,11 +9030,11 @@
         <p:spPr>
           <a:xfrm>
             <a:off x="512064" y="5321808"/>
-            <a:ext cx="7973568" cy="887176"/>
+            <a:ext cx="7973568" cy="855990"/>
           </a:xfrm>
           <a:prstGeom prst="roundRect">
             <a:avLst>
-              <a:gd name="adj" fmla="val 6184"/>
+              <a:gd name="adj" fmla="val 6409"/>
             </a:avLst>
           </a:prstGeom>
           <a:solidFill>
@@ -9065,7 +9065,7 @@
         <p:spPr>
           <a:xfrm>
             <a:off x="566928" y="5376672"/>
-            <a:ext cx="7863840" cy="777448"/>
+            <a:ext cx="7863840" cy="746262"/>
           </a:xfrm>
           <a:prstGeom prst="rect">
             <a:avLst/>
@@ -9080,7 +9080,7 @@
         </p:nvSpPr>
         <p:spPr>
           <a:xfrm>
-            <a:off x="8750808" y="5646524"/>
+            <a:off x="8750808" y="5630931"/>
             <a:ext cx="2834640" cy="237744"/>
           </a:xfrm>
           <a:prstGeom prst="rect">
@@ -9945,11 +9945,11 @@
         <p:spPr>
           <a:xfrm>
             <a:off x="7004304" y="1911096"/>
-            <a:ext cx="4672584" cy="1110445"/>
+            <a:ext cx="4672584" cy="1082827"/>
           </a:xfrm>
           <a:prstGeom prst="roundRect">
             <a:avLst>
-              <a:gd name="adj" fmla="val 4941"/>
+              <a:gd name="adj" fmla="val 5067"/>
             </a:avLst>
           </a:prstGeom>
           <a:solidFill>
@@ -9980,7 +9980,7 @@
         <p:spPr>
           <a:xfrm>
             <a:off x="7059168" y="1965960"/>
-            <a:ext cx="4562856" cy="1000717"/>
+            <a:ext cx="4562856" cy="973099"/>
           </a:xfrm>
           <a:prstGeom prst="rect">
             <a:avLst/>
@@ -9995,7 +9995,7 @@
         </p:nvSpPr>
         <p:spPr>
           <a:xfrm>
-            <a:off x="7059168" y="3112981"/>
+            <a:off x="7059168" y="3085363"/>
             <a:ext cx="4562856" cy="237744"/>
           </a:xfrm>
           <a:prstGeom prst="rect">
@@ -11085,11 +11085,11 @@
         <p:spPr>
           <a:xfrm>
             <a:off x="512064" y="1682496"/>
-            <a:ext cx="11167567" cy="1770940"/>
+            <a:ext cx="11167567" cy="2441885"/>
           </a:xfrm>
           <a:prstGeom prst="roundRect">
             <a:avLst>
-              <a:gd name="adj" fmla="val 3098"/>
+              <a:gd name="adj" fmla="val 2247"/>
             </a:avLst>
           </a:prstGeom>
           <a:solidFill>
@@ -11120,7 +11120,7 @@
         <p:spPr>
           <a:xfrm>
             <a:off x="566928" y="1737360"/>
-            <a:ext cx="11057839" cy="1661212"/>
+            <a:ext cx="11057839" cy="2332157"/>
           </a:xfrm>
           <a:prstGeom prst="rect">
             <a:avLst/>
@@ -11135,7 +11135,7 @@
         </p:nvSpPr>
         <p:spPr>
           <a:xfrm>
-            <a:off x="566928" y="3544876"/>
+            <a:off x="566928" y="4215821"/>
             <a:ext cx="11057839" cy="237744"/>
           </a:xfrm>
           <a:prstGeom prst="rect">
@@ -11937,11 +11937,11 @@
         <p:spPr>
           <a:xfrm>
             <a:off x="512064" y="4471416"/>
-            <a:ext cx="11167567" cy="769140"/>
+            <a:ext cx="11167567" cy="1110849"/>
           </a:xfrm>
           <a:prstGeom prst="roundRect">
             <a:avLst>
-              <a:gd name="adj" fmla="val 7133"/>
+              <a:gd name="adj" fmla="val 4939"/>
             </a:avLst>
           </a:prstGeom>
           <a:solidFill>
@@ -11972,7 +11972,7 @@
         <p:spPr>
           <a:xfrm>
             <a:off x="566928" y="4526280"/>
-            <a:ext cx="11057839" cy="659412"/>
+            <a:ext cx="11057839" cy="1001121"/>
           </a:xfrm>
           <a:prstGeom prst="rect">
             <a:avLst/>
@@ -11987,7 +11987,7 @@
         </p:nvSpPr>
         <p:spPr>
           <a:xfrm>
-            <a:off x="566928" y="5350284"/>
+            <a:off x="566928" y="5691993"/>
             <a:ext cx="11057839" cy="237744"/>
           </a:xfrm>
           <a:prstGeom prst="rect">
@@ -12493,11 +12493,11 @@
         <p:spPr>
           <a:xfrm>
             <a:off x="822960" y="5120640"/>
-            <a:ext cx="10533888" cy="1173662"/>
+            <a:ext cx="10533888" cy="1729119"/>
           </a:xfrm>
           <a:prstGeom prst="roundRect">
             <a:avLst>
-              <a:gd name="adj" fmla="val 4675"/>
+              <a:gd name="adj" fmla="val 3173"/>
             </a:avLst>
           </a:prstGeom>
           <a:solidFill>
@@ -12528,7 +12528,7 @@
         <p:spPr>
           <a:xfrm>
             <a:off x="877824" y="5175504"/>
-            <a:ext cx="10424160" cy="1063934"/>
+            <a:ext cx="10424160" cy="1619391"/>
           </a:xfrm>
           <a:prstGeom prst="rect">
             <a:avLst/>
